--- a/public/downloads/US-114050-L4-Business-Information-Needs.pptx
+++ b/public/downloads/US-114050-L4-Business-Information-Needs.pptx
@@ -2314,7 +2314,7 @@
                 <a:ea typeface="Aptos" pitchFamily="34" charset="-122"/>
                 <a:cs typeface="Aptos" pitchFamily="34" charset="-120"/>
               </a:rPr>
-              <a:t>Thursday, 27 Aug 2026 · 09h00 – 14h00</a:t>
+              <a:t>Friday, 28 Aug 2026 · 09h00 – 14h00</a:t>
             </a:r>
             <a:endParaRPr lang="en-US" sz="1800" dirty="0"/>
           </a:p>
